--- a/knowledge-pool/public/doc-claude-ver/ServiceTransfer_Complete_Presentation.pptx
+++ b/knowledge-pool/public/doc-claude-ver/ServiceTransfer_Complete_Presentation.pptx
@@ -11,6 +11,7 @@
     <p:sldId id="256" r:id="rId2"/>
     <p:sldId id="257" r:id="rId3"/>
     <p:sldId id="258" r:id="rId4"/>
+    <p:sldId id="272" r:id="rId23"/>
     <p:sldId id="259" r:id="rId5"/>
     <p:sldId id="260" r:id="rId6"/>
     <p:sldId id="261" r:id="rId7"/>
@@ -2229,6 +2230,10 @@
           </a:solidFill>
           <a:ln/>
         </p:spPr>
+        <p:txBody>
+          <a:bodyPr/>
+          <a:p/>
+        </p:txBody>
       </p:sp>
       <p:sp>
         <p:nvSpPr>
@@ -2249,6 +2254,10 @@
           </a:solidFill>
           <a:ln/>
         </p:spPr>
+        <p:txBody>
+          <a:bodyPr/>
+          <a:p/>
+        </p:txBody>
       </p:sp>
       <p:sp>
         <p:nvSpPr>
@@ -2269,6 +2278,10 @@
           </a:solidFill>
           <a:ln/>
         </p:spPr>
+        <p:txBody>
+          <a:bodyPr/>
+          <a:p/>
+        </p:txBody>
       </p:sp>
       <p:sp>
         <p:nvSpPr>
@@ -2289,6 +2302,10 @@
           </a:solidFill>
           <a:ln/>
         </p:spPr>
+        <p:txBody>
+          <a:bodyPr/>
+          <a:p/>
+        </p:txBody>
       </p:sp>
       <p:sp>
         <p:nvSpPr>
@@ -2472,6 +2489,10 @@
             <a:prstDash val="solid"/>
           </a:ln>
         </p:spPr>
+        <p:txBody>
+          <a:bodyPr/>
+          <a:p/>
+        </p:txBody>
       </p:sp>
       <p:sp>
         <p:nvSpPr>
@@ -2577,6 +2598,10 @@
             <a:prstDash val="solid"/>
           </a:ln>
         </p:spPr>
+        <p:txBody>
+          <a:bodyPr/>
+          <a:p/>
+        </p:txBody>
       </p:sp>
       <p:sp>
         <p:nvSpPr>
@@ -2682,6 +2707,10 @@
             <a:prstDash val="solid"/>
           </a:ln>
         </p:spPr>
+        <p:txBody>
+          <a:bodyPr/>
+          <a:p/>
+        </p:txBody>
       </p:sp>
       <p:sp>
         <p:nvSpPr>
@@ -2787,6 +2816,10 @@
             <a:prstDash val="solid"/>
           </a:ln>
         </p:spPr>
+        <p:txBody>
+          <a:bodyPr/>
+          <a:p/>
+        </p:txBody>
       </p:sp>
       <p:sp>
         <p:nvSpPr>
@@ -3077,6 +3110,10 @@
             <a:prstDash val="solid"/>
           </a:ln>
         </p:spPr>
+        <p:txBody>
+          <a:bodyPr/>
+          <a:p/>
+        </p:txBody>
       </p:sp>
       <p:sp>
         <p:nvSpPr>
@@ -3099,6 +3136,10 @@
           </a:solidFill>
           <a:ln/>
         </p:spPr>
+        <p:txBody>
+          <a:bodyPr/>
+          <a:p/>
+        </p:txBody>
       </p:sp>
       <p:sp>
         <p:nvSpPr>
@@ -3236,6 +3277,10 @@
           </a:solidFill>
           <a:ln/>
         </p:spPr>
+        <p:txBody>
+          <a:bodyPr/>
+          <a:p/>
+        </p:txBody>
       </p:sp>
       <p:sp>
         <p:nvSpPr>
@@ -3263,6 +3308,10 @@
             <a:prstDash val="solid"/>
           </a:ln>
         </p:spPr>
+        <p:txBody>
+          <a:bodyPr/>
+          <a:p/>
+        </p:txBody>
       </p:sp>
       <p:sp>
         <p:nvSpPr>
@@ -3285,6 +3334,10 @@
           </a:solidFill>
           <a:ln/>
         </p:spPr>
+        <p:txBody>
+          <a:bodyPr/>
+          <a:p/>
+        </p:txBody>
       </p:sp>
       <p:sp>
         <p:nvSpPr>
@@ -3422,6 +3475,10 @@
           </a:solidFill>
           <a:ln/>
         </p:spPr>
+        <p:txBody>
+          <a:bodyPr/>
+          <a:p/>
+        </p:txBody>
       </p:sp>
       <p:sp>
         <p:nvSpPr>
@@ -3449,6 +3506,10 @@
             <a:prstDash val="solid"/>
           </a:ln>
         </p:spPr>
+        <p:txBody>
+          <a:bodyPr/>
+          <a:p/>
+        </p:txBody>
       </p:sp>
       <p:sp>
         <p:nvSpPr>
@@ -3471,6 +3532,10 @@
           </a:solidFill>
           <a:ln/>
         </p:spPr>
+        <p:txBody>
+          <a:bodyPr/>
+          <a:p/>
+        </p:txBody>
       </p:sp>
       <p:sp>
         <p:nvSpPr>
@@ -3615,6 +3680,10 @@
             <a:prstDash val="solid"/>
           </a:ln>
         </p:spPr>
+        <p:txBody>
+          <a:bodyPr/>
+          <a:p/>
+        </p:txBody>
       </p:sp>
       <p:sp>
         <p:nvSpPr>
@@ -3637,6 +3706,10 @@
           </a:solidFill>
           <a:ln/>
         </p:spPr>
+        <p:txBody>
+          <a:bodyPr/>
+          <a:p/>
+        </p:txBody>
       </p:sp>
       <p:sp>
         <p:nvSpPr>
@@ -3774,6 +3847,10 @@
           </a:solidFill>
           <a:ln/>
         </p:spPr>
+        <p:txBody>
+          <a:bodyPr/>
+          <a:p/>
+        </p:txBody>
       </p:sp>
       <p:sp>
         <p:nvSpPr>
@@ -3801,6 +3878,10 @@
             <a:prstDash val="solid"/>
           </a:ln>
         </p:spPr>
+        <p:txBody>
+          <a:bodyPr/>
+          <a:p/>
+        </p:txBody>
       </p:sp>
       <p:sp>
         <p:nvSpPr>
@@ -3823,6 +3904,10 @@
           </a:solidFill>
           <a:ln/>
         </p:spPr>
+        <p:txBody>
+          <a:bodyPr/>
+          <a:p/>
+        </p:txBody>
       </p:sp>
       <p:sp>
         <p:nvSpPr>
@@ -3960,6 +4045,10 @@
           </a:solidFill>
           <a:ln/>
         </p:spPr>
+        <p:txBody>
+          <a:bodyPr/>
+          <a:p/>
+        </p:txBody>
       </p:sp>
       <p:sp>
         <p:nvSpPr>
@@ -3987,6 +4076,10 @@
             <a:prstDash val="solid"/>
           </a:ln>
         </p:spPr>
+        <p:txBody>
+          <a:bodyPr/>
+          <a:p/>
+        </p:txBody>
       </p:sp>
       <p:sp>
         <p:nvSpPr>
@@ -4009,6 +4102,10 @@
           </a:solidFill>
           <a:ln/>
         </p:spPr>
+        <p:txBody>
+          <a:bodyPr/>
+          <a:p/>
+        </p:txBody>
       </p:sp>
       <p:sp>
         <p:nvSpPr>
@@ -4160,6 +4257,10 @@
             </a:outerShdw>
           </a:effectLst>
         </p:spPr>
+        <p:txBody>
+          <a:bodyPr/>
+          <a:p/>
+        </p:txBody>
       </p:sp>
       <p:sp>
         <p:nvSpPr>
@@ -4315,6 +4416,10 @@
             </a:outerShdw>
           </a:effectLst>
         </p:spPr>
+        <p:txBody>
+          <a:bodyPr/>
+          <a:p/>
+        </p:txBody>
       </p:sp>
       <p:sp>
         <p:nvSpPr>
@@ -6264,6 +6369,10 @@
             <a:prstDash val="solid"/>
           </a:ln>
         </p:spPr>
+        <p:txBody>
+          <a:bodyPr/>
+          <a:p/>
+        </p:txBody>
       </p:sp>
       <p:sp>
         <p:nvSpPr>
@@ -6536,6 +6645,10 @@
             </a:outerShdw>
           </a:effectLst>
         </p:spPr>
+        <p:txBody>
+          <a:bodyPr/>
+          <a:p/>
+        </p:txBody>
       </p:sp>
       <p:sp>
         <p:nvSpPr>
@@ -6558,6 +6671,10 @@
           </a:solidFill>
           <a:ln/>
         </p:spPr>
+        <p:txBody>
+          <a:bodyPr/>
+          <a:p/>
+        </p:txBody>
       </p:sp>
       <p:sp>
         <p:nvSpPr>
@@ -6617,6 +6734,10 @@
           </a:solidFill>
           <a:ln/>
         </p:spPr>
+        <p:txBody>
+          <a:bodyPr/>
+          <a:p/>
+        </p:txBody>
       </p:sp>
       <p:sp>
         <p:nvSpPr>
@@ -6679,6 +6800,10 @@
           </a:solidFill>
           <a:ln/>
         </p:spPr>
+        <p:txBody>
+          <a:bodyPr/>
+          <a:p/>
+        </p:txBody>
       </p:sp>
       <p:sp>
         <p:nvSpPr>
@@ -6741,6 +6866,10 @@
           </a:solidFill>
           <a:ln/>
         </p:spPr>
+        <p:txBody>
+          <a:bodyPr/>
+          <a:p/>
+        </p:txBody>
       </p:sp>
       <p:sp>
         <p:nvSpPr>
@@ -6803,6 +6932,10 @@
           </a:solidFill>
           <a:ln/>
         </p:spPr>
+        <p:txBody>
+          <a:bodyPr/>
+          <a:p/>
+        </p:txBody>
       </p:sp>
       <p:sp>
         <p:nvSpPr>
@@ -6879,6 +7012,10 @@
             </a:outerShdw>
           </a:effectLst>
         </p:spPr>
+        <p:txBody>
+          <a:bodyPr/>
+          <a:p/>
+        </p:txBody>
       </p:sp>
       <p:sp>
         <p:nvSpPr>
@@ -6901,6 +7038,10 @@
           </a:solidFill>
           <a:ln/>
         </p:spPr>
+        <p:txBody>
+          <a:bodyPr/>
+          <a:p/>
+        </p:txBody>
       </p:sp>
       <p:sp>
         <p:nvSpPr>
@@ -6960,6 +7101,10 @@
           </a:solidFill>
           <a:ln/>
         </p:spPr>
+        <p:txBody>
+          <a:bodyPr/>
+          <a:p/>
+        </p:txBody>
       </p:sp>
       <p:sp>
         <p:nvSpPr>
@@ -7022,6 +7167,10 @@
           </a:solidFill>
           <a:ln/>
         </p:spPr>
+        <p:txBody>
+          <a:bodyPr/>
+          <a:p/>
+        </p:txBody>
       </p:sp>
       <p:sp>
         <p:nvSpPr>
@@ -7084,6 +7233,10 @@
           </a:solidFill>
           <a:ln/>
         </p:spPr>
+        <p:txBody>
+          <a:bodyPr/>
+          <a:p/>
+        </p:txBody>
       </p:sp>
       <p:sp>
         <p:nvSpPr>
@@ -7146,6 +7299,10 @@
           </a:solidFill>
           <a:ln/>
         </p:spPr>
+        <p:txBody>
+          <a:bodyPr/>
+          <a:p/>
+        </p:txBody>
       </p:sp>
       <p:sp>
         <p:nvSpPr>
@@ -7222,6 +7379,10 @@
             </a:outerShdw>
           </a:effectLst>
         </p:spPr>
+        <p:txBody>
+          <a:bodyPr/>
+          <a:p/>
+        </p:txBody>
       </p:sp>
       <p:sp>
         <p:nvSpPr>
@@ -7244,6 +7405,10 @@
           </a:solidFill>
           <a:ln/>
         </p:spPr>
+        <p:txBody>
+          <a:bodyPr/>
+          <a:p/>
+        </p:txBody>
       </p:sp>
       <p:sp>
         <p:nvSpPr>
@@ -7303,6 +7468,10 @@
           </a:solidFill>
           <a:ln/>
         </p:spPr>
+        <p:txBody>
+          <a:bodyPr/>
+          <a:p/>
+        </p:txBody>
       </p:sp>
       <p:sp>
         <p:nvSpPr>
@@ -7365,6 +7534,10 @@
           </a:solidFill>
           <a:ln/>
         </p:spPr>
+        <p:txBody>
+          <a:bodyPr/>
+          <a:p/>
+        </p:txBody>
       </p:sp>
       <p:sp>
         <p:nvSpPr>
@@ -7427,6 +7600,10 @@
           </a:solidFill>
           <a:ln/>
         </p:spPr>
+        <p:txBody>
+          <a:bodyPr/>
+          <a:p/>
+        </p:txBody>
       </p:sp>
       <p:sp>
         <p:nvSpPr>
@@ -7489,6 +7666,10 @@
           </a:solidFill>
           <a:ln/>
         </p:spPr>
+        <p:txBody>
+          <a:bodyPr/>
+          <a:p/>
+        </p:txBody>
       </p:sp>
       <p:sp>
         <p:nvSpPr>
@@ -7558,6 +7739,10 @@
             <a:prstDash val="solid"/>
           </a:ln>
         </p:spPr>
+        <p:txBody>
+          <a:bodyPr/>
+          <a:p/>
+        </p:txBody>
       </p:sp>
       <p:sp>
         <p:nvSpPr>
@@ -7816,6 +8001,10 @@
             </a:outerShdw>
           </a:effectLst>
         </p:spPr>
+        <p:txBody>
+          <a:bodyPr/>
+          <a:p/>
+        </p:txBody>
       </p:sp>
       <p:sp>
         <p:nvSpPr>
@@ -7948,6 +8137,10 @@
           </a:solidFill>
           <a:ln/>
         </p:spPr>
+        <p:txBody>
+          <a:bodyPr/>
+          <a:p/>
+        </p:txBody>
       </p:sp>
       <p:sp>
         <p:nvSpPr>
@@ -8021,6 +8214,10 @@
             </a:outerShdw>
           </a:effectLst>
         </p:spPr>
+        <p:txBody>
+          <a:bodyPr/>
+          <a:p/>
+        </p:txBody>
       </p:sp>
       <p:sp>
         <p:nvSpPr>
@@ -8153,6 +8350,10 @@
           </a:solidFill>
           <a:ln/>
         </p:spPr>
+        <p:txBody>
+          <a:bodyPr/>
+          <a:p/>
+        </p:txBody>
       </p:sp>
       <p:sp>
         <p:nvSpPr>
@@ -8226,6 +8427,10 @@
             </a:outerShdw>
           </a:effectLst>
         </p:spPr>
+        <p:txBody>
+          <a:bodyPr/>
+          <a:p/>
+        </p:txBody>
       </p:sp>
       <p:sp>
         <p:nvSpPr>
@@ -8372,6 +8577,10 @@
             </a:outerShdw>
           </a:effectLst>
         </p:spPr>
+        <p:txBody>
+          <a:bodyPr/>
+          <a:p/>
+        </p:txBody>
       </p:sp>
       <p:sp>
         <p:nvSpPr>
@@ -8501,6 +8710,10 @@
             </a:outerShdw>
           </a:effectLst>
         </p:spPr>
+        <p:txBody>
+          <a:bodyPr/>
+          <a:p/>
+        </p:txBody>
       </p:sp>
       <p:sp>
         <p:nvSpPr>
@@ -8630,6 +8843,10 @@
             </a:outerShdw>
           </a:effectLst>
         </p:spPr>
+        <p:txBody>
+          <a:bodyPr/>
+          <a:p/>
+        </p:txBody>
       </p:sp>
       <p:sp>
         <p:nvSpPr>
@@ -8745,6 +8962,10 @@
           </a:solidFill>
           <a:ln/>
         </p:spPr>
+        <p:txBody>
+          <a:bodyPr/>
+          <a:p/>
+        </p:txBody>
       </p:sp>
       <p:sp>
         <p:nvSpPr>
@@ -8765,6 +8986,10 @@
           </a:solidFill>
           <a:ln/>
         </p:spPr>
+        <p:txBody>
+          <a:bodyPr/>
+          <a:p/>
+        </p:txBody>
       </p:sp>
       <p:sp>
         <p:nvSpPr>
@@ -8785,6 +9010,10 @@
           </a:solidFill>
           <a:ln/>
         </p:spPr>
+        <p:txBody>
+          <a:bodyPr/>
+          <a:p/>
+        </p:txBody>
       </p:sp>
       <p:sp>
         <p:nvSpPr>
@@ -8812,6 +9041,10 @@
             <a:prstDash val="solid"/>
           </a:ln>
         </p:spPr>
+        <p:txBody>
+          <a:bodyPr/>
+          <a:p/>
+        </p:txBody>
       </p:sp>
       <p:sp>
         <p:nvSpPr>
@@ -11245,6 +11478,10 @@
             <a:prstDash val="solid"/>
           </a:ln>
         </p:spPr>
+        <p:txBody>
+          <a:bodyPr/>
+          <a:p/>
+        </p:txBody>
       </p:sp>
       <p:sp>
         <p:nvSpPr>
@@ -11510,6 +11747,10 @@
             <a:prstDash val="solid"/>
           </a:ln>
         </p:spPr>
+        <p:txBody>
+          <a:bodyPr/>
+          <a:p/>
+        </p:txBody>
       </p:sp>
       <p:sp>
         <p:nvSpPr>
@@ -11532,6 +11773,10 @@
           </a:solidFill>
           <a:ln/>
         </p:spPr>
+        <p:txBody>
+          <a:bodyPr/>
+          <a:p/>
+        </p:txBody>
       </p:sp>
       <p:sp>
         <p:nvSpPr>
@@ -11676,6 +11921,10 @@
             <a:prstDash val="solid"/>
           </a:ln>
         </p:spPr>
+        <p:txBody>
+          <a:bodyPr/>
+          <a:p/>
+        </p:txBody>
       </p:sp>
       <p:sp>
         <p:nvSpPr>
@@ -11698,6 +11947,10 @@
           </a:solidFill>
           <a:ln/>
         </p:spPr>
+        <p:txBody>
+          <a:bodyPr/>
+          <a:p/>
+        </p:txBody>
       </p:sp>
       <p:sp>
         <p:nvSpPr>
@@ -11842,6 +12095,10 @@
             <a:prstDash val="solid"/>
           </a:ln>
         </p:spPr>
+        <p:txBody>
+          <a:bodyPr/>
+          <a:p/>
+        </p:txBody>
       </p:sp>
       <p:sp>
         <p:nvSpPr>
@@ -11864,6 +12121,10 @@
           </a:solidFill>
           <a:ln/>
         </p:spPr>
+        <p:txBody>
+          <a:bodyPr/>
+          <a:p/>
+        </p:txBody>
       </p:sp>
       <p:sp>
         <p:nvSpPr>
@@ -12047,6 +12308,10 @@
             <a:prstDash val="solid"/>
           </a:ln>
         </p:spPr>
+        <p:txBody>
+          <a:bodyPr/>
+          <a:p/>
+        </p:txBody>
       </p:sp>
       <p:sp>
         <p:nvSpPr>
@@ -12067,6 +12332,10 @@
           </a:solidFill>
           <a:ln/>
         </p:spPr>
+        <p:txBody>
+          <a:bodyPr/>
+          <a:p/>
+        </p:txBody>
       </p:sp>
       <p:sp>
         <p:nvSpPr>
@@ -12175,6 +12444,10 @@
             <a:prstDash val="solid"/>
           </a:ln>
         </p:spPr>
+        <p:txBody>
+          <a:bodyPr/>
+          <a:p/>
+        </p:txBody>
       </p:sp>
       <p:sp>
         <p:nvSpPr>
@@ -12195,6 +12468,10 @@
           </a:solidFill>
           <a:ln/>
         </p:spPr>
+        <p:txBody>
+          <a:bodyPr/>
+          <a:p/>
+        </p:txBody>
       </p:sp>
       <p:sp>
         <p:nvSpPr>
@@ -12303,6 +12580,10 @@
             <a:prstDash val="solid"/>
           </a:ln>
         </p:spPr>
+        <p:txBody>
+          <a:bodyPr/>
+          <a:p/>
+        </p:txBody>
       </p:sp>
       <p:sp>
         <p:nvSpPr>
@@ -12323,6 +12604,10 @@
           </a:solidFill>
           <a:ln/>
         </p:spPr>
+        <p:txBody>
+          <a:bodyPr/>
+          <a:p/>
+        </p:txBody>
       </p:sp>
       <p:sp>
         <p:nvSpPr>
@@ -12431,6 +12716,10 @@
             <a:prstDash val="solid"/>
           </a:ln>
         </p:spPr>
+        <p:txBody>
+          <a:bodyPr/>
+          <a:p/>
+        </p:txBody>
       </p:sp>
       <p:sp>
         <p:nvSpPr>
@@ -12451,6 +12740,10 @@
           </a:solidFill>
           <a:ln/>
         </p:spPr>
+        <p:txBody>
+          <a:bodyPr/>
+          <a:p/>
+        </p:txBody>
       </p:sp>
       <p:sp>
         <p:nvSpPr>
@@ -12623,6 +12916,10 @@
           </a:solidFill>
           <a:ln/>
         </p:spPr>
+        <p:txBody>
+          <a:bodyPr/>
+          <a:p/>
+        </p:txBody>
       </p:sp>
       <p:sp>
         <p:nvSpPr>
@@ -12643,6 +12940,10 @@
           </a:solidFill>
           <a:ln/>
         </p:spPr>
+        <p:txBody>
+          <a:bodyPr/>
+          <a:p/>
+        </p:txBody>
       </p:sp>
       <p:sp>
         <p:nvSpPr>
@@ -12663,6 +12964,10 @@
           </a:solidFill>
           <a:ln/>
         </p:spPr>
+        <p:txBody>
+          <a:bodyPr/>
+          <a:p/>
+        </p:txBody>
       </p:sp>
       <p:sp>
         <p:nvSpPr>
@@ -12817,6 +13122,848 @@
               <a:t>ServiceTransfer v5.1810.1 — System Revamp Documentation  •  Reverse Engineering Analysis</a:t>
             </a:r>
             <a:endParaRPr lang="en-US" sz="950" dirty="0"/>
+          </a:p>
+        </p:txBody>
+      </p:sp>
+    </p:spTree>
+  </p:cSld>
+  <p:clrMapOvr>
+    <a:masterClrMapping/>
+  </p:clrMapOvr>
+</p:sld>
+</file>
+
+<file path=ppt/slides/slide17.xml><?xml version="1.0" encoding="utf-8"?>
+<p:sld xmlns:a="http://schemas.openxmlformats.org/drawingml/2006/main" xmlns:p="http://schemas.openxmlformats.org/presentationml/2006/main" xmlns:r="http://schemas.openxmlformats.org/officeDocument/2006/relationships">
+  <p:cSld>
+    <p:spTree>
+      <p:nvGrpSpPr>
+        <p:cNvPr id="1" name=""/>
+        <p:cNvGrpSpPr/>
+        <p:nvPr/>
+      </p:nvGrpSpPr>
+      <p:grpSpPr/>
+      <p:sp>
+        <p:nvSpPr>
+          <p:cNvPr id="2" name="Rectangle 1"/>
+          <p:cNvSpPr/>
+          <p:nvPr/>
+        </p:nvSpPr>
+        <p:spPr>
+          <a:xfrm>
+            <a:off x="0" y="0"/>
+            <a:ext cx="9144000" cy="5143500"/>
+          </a:xfrm>
+          <a:prstGeom prst="rect">
+            <a:avLst/>
+          </a:prstGeom>
+          <a:solidFill>
+            <a:srgbClr val="FFFFFF"/>
+          </a:solidFill>
+          <a:ln>
+            <a:noFill/>
+          </a:ln>
+          <a:effectLst/>
+        </p:spPr>
+        <p:style>
+          <a:lnRef idx="1">
+            <a:schemeClr val="accent1"/>
+          </a:lnRef>
+          <a:fillRef idx="3">
+            <a:schemeClr val="accent1"/>
+          </a:fillRef>
+          <a:effectRef idx="2">
+            <a:schemeClr val="accent1"/>
+          </a:effectRef>
+          <a:fontRef idx="minor">
+            <a:schemeClr val="lt1"/>
+          </a:fontRef>
+        </p:style>
+        <p:txBody>
+          <a:bodyPr rtlCol="0" anchor="ctr"/>
+          <a:lstStyle/>
+          <a:p>
+            <a:pPr algn="ctr"/>
+          </a:p>
+        </p:txBody>
+      </p:sp>
+      <p:sp>
+        <p:nvSpPr>
+          <p:cNvPr id="3" name="TextBox 2"/>
+          <p:cNvSpPr txBox="1"/>
+          <p:nvPr/>
+        </p:nvSpPr>
+        <p:spPr>
+          <a:xfrm>
+            <a:off x="502920" y="292608"/>
+            <a:ext cx="8229600" cy="274320"/>
+          </a:xfrm>
+          <a:prstGeom prst="rect">
+            <a:avLst/>
+          </a:prstGeom>
+          <a:noFill/>
+        </p:spPr>
+        <p:txBody>
+          <a:bodyPr wrap="square" anchor="t" lIns="36576" rIns="36576" tIns="18288" bIns="18288">
+            <a:spAutoFit/>
+          </a:bodyPr>
+          <a:lstStyle/>
+          <a:p>
+            <a:pPr algn="l"/>
+            <a:r>
+              <a:rPr sz="1100" b="1">
+                <a:solidFill>
+                  <a:srgbClr val="1565C0"/>
+                </a:solidFill>
+                <a:latin typeface="Tahoma"/>
+              </a:rPr>
+              <a:t>UPSTREAM PRODUCER</a:t>
+            </a:r>
+          </a:p>
+        </p:txBody>
+      </p:sp>
+      <p:sp>
+        <p:nvSpPr>
+          <p:cNvPr id="4" name="TextBox 3"/>
+          <p:cNvSpPr txBox="1"/>
+          <p:nvPr/>
+        </p:nvSpPr>
+        <p:spPr>
+          <a:xfrm>
+            <a:off x="502920" y="530352"/>
+            <a:ext cx="8229600" cy="502920"/>
+          </a:xfrm>
+          <a:prstGeom prst="rect">
+            <a:avLst/>
+          </a:prstGeom>
+          <a:noFill/>
+        </p:spPr>
+        <p:txBody>
+          <a:bodyPr wrap="square" anchor="t" lIns="36576" rIns="36576" tIns="18288" bIns="18288">
+            <a:spAutoFit/>
+          </a:bodyPr>
+          <a:lstStyle/>
+          <a:p>
+            <a:pPr algn="l"/>
+            <a:r>
+              <a:rPr sz="2500" b="1">
+                <a:solidFill>
+                  <a:srgbClr val="1A2733"/>
+                </a:solidFill>
+                <a:latin typeface="Tahoma"/>
+              </a:rPr>
+              <a:t>POSFront — โปรแกรมขายต้นทาง</a:t>
+            </a:r>
+          </a:p>
+        </p:txBody>
+      </p:sp>
+      <p:sp>
+        <p:nvSpPr>
+          <p:cNvPr id="5" name="TextBox 4"/>
+          <p:cNvSpPr txBox="1"/>
+          <p:nvPr/>
+        </p:nvSpPr>
+        <p:spPr>
+          <a:xfrm>
+            <a:off x="502920" y="1170432"/>
+            <a:ext cx="8138160" cy="457200"/>
+          </a:xfrm>
+          <a:prstGeom prst="rect">
+            <a:avLst/>
+          </a:prstGeom>
+          <a:noFill/>
+        </p:spPr>
+        <p:txBody>
+          <a:bodyPr wrap="square" anchor="t" lIns="36576" rIns="36576" tIns="18288" bIns="18288">
+            <a:spAutoFit/>
+          </a:bodyPr>
+          <a:lstStyle/>
+          <a:p>
+            <a:pPr algn="l"/>
+            <a:r>
+              <a:rPr sz="1300" b="1">
+                <a:solidFill>
+                  <a:srgbClr val="0D47A1"/>
+                </a:solidFill>
+                <a:latin typeface="Tahoma"/>
+              </a:rPr>
+              <a:t>บนเครื่อง POS มีสองโปรแกรมทำงานร่วมกันแบบ Producer / Consumer ส่งต่อกันผ่าน Local DB ด้วยธงสถานะ 2 ตัว</a:t>
+            </a:r>
+          </a:p>
+        </p:txBody>
+      </p:sp>
+      <p:sp>
+        <p:nvSpPr>
+          <p:cNvPr id="6" name="Rounded Rectangle 5"/>
+          <p:cNvSpPr/>
+          <p:nvPr/>
+        </p:nvSpPr>
+        <p:spPr>
+          <a:xfrm>
+            <a:off x="502920" y="1783080"/>
+            <a:ext cx="4041648" cy="1783080"/>
+          </a:xfrm>
+          <a:prstGeom prst="roundRect">
+            <a:avLst/>
+          </a:prstGeom>
+          <a:solidFill>
+            <a:srgbClr val="E3F2FD"/>
+          </a:solidFill>
+          <a:ln>
+            <a:noFill/>
+          </a:ln>
+          <a:effectLst/>
+        </p:spPr>
+        <p:style>
+          <a:lnRef idx="1">
+            <a:schemeClr val="accent1"/>
+          </a:lnRef>
+          <a:fillRef idx="3">
+            <a:schemeClr val="accent1"/>
+          </a:fillRef>
+          <a:effectRef idx="2">
+            <a:schemeClr val="accent1"/>
+          </a:effectRef>
+          <a:fontRef idx="minor">
+            <a:schemeClr val="lt1"/>
+          </a:fontRef>
+        </p:style>
+        <p:txBody>
+          <a:bodyPr rtlCol="0" anchor="ctr"/>
+          <a:lstStyle/>
+          <a:p>
+            <a:pPr algn="ctr"/>
+          </a:p>
+        </p:txBody>
+      </p:sp>
+      <p:sp>
+        <p:nvSpPr>
+          <p:cNvPr id="7" name="Rectangle 6"/>
+          <p:cNvSpPr/>
+          <p:nvPr/>
+        </p:nvSpPr>
+        <p:spPr>
+          <a:xfrm>
+            <a:off x="502920" y="1783080"/>
+            <a:ext cx="82296" cy="1783080"/>
+          </a:xfrm>
+          <a:prstGeom prst="rect">
+            <a:avLst/>
+          </a:prstGeom>
+          <a:solidFill>
+            <a:srgbClr val="1565C0"/>
+          </a:solidFill>
+          <a:ln>
+            <a:noFill/>
+          </a:ln>
+          <a:effectLst/>
+        </p:spPr>
+        <p:style>
+          <a:lnRef idx="1">
+            <a:schemeClr val="accent1"/>
+          </a:lnRef>
+          <a:fillRef idx="3">
+            <a:schemeClr val="accent1"/>
+          </a:fillRef>
+          <a:effectRef idx="2">
+            <a:schemeClr val="accent1"/>
+          </a:effectRef>
+          <a:fontRef idx="minor">
+            <a:schemeClr val="lt1"/>
+          </a:fontRef>
+        </p:style>
+        <p:txBody>
+          <a:bodyPr rtlCol="0" anchor="ctr"/>
+          <a:lstStyle/>
+          <a:p>
+            <a:pPr algn="ctr"/>
+          </a:p>
+        </p:txBody>
+      </p:sp>
+      <p:sp>
+        <p:nvSpPr>
+          <p:cNvPr id="8" name="TextBox 7"/>
+          <p:cNvSpPr txBox="1"/>
+          <p:nvPr/>
+        </p:nvSpPr>
+        <p:spPr>
+          <a:xfrm>
+            <a:off x="704088" y="1911095"/>
+            <a:ext cx="3675887" cy="292608"/>
+          </a:xfrm>
+          <a:prstGeom prst="rect">
+            <a:avLst/>
+          </a:prstGeom>
+          <a:noFill/>
+        </p:spPr>
+        <p:txBody>
+          <a:bodyPr wrap="square" anchor="t" lIns="36576" rIns="36576" tIns="18288" bIns="18288">
+            <a:spAutoFit/>
+          </a:bodyPr>
+          <a:lstStyle/>
+          <a:p>
+            <a:pPr algn="l"/>
+            <a:r>
+              <a:rPr sz="1400" b="1">
+                <a:solidFill>
+                  <a:srgbClr val="1A2733"/>
+                </a:solidFill>
+                <a:latin typeface="Tahoma"/>
+              </a:rPr>
+              <a:t>POSFront (Producer)</a:t>
+            </a:r>
+          </a:p>
+        </p:txBody>
+      </p:sp>
+      <p:sp>
+        <p:nvSpPr>
+          <p:cNvPr id="9" name="TextBox 8"/>
+          <p:cNvSpPr txBox="1"/>
+          <p:nvPr/>
+        </p:nvSpPr>
+        <p:spPr>
+          <a:xfrm>
+            <a:off x="704088" y="2221991"/>
+            <a:ext cx="3675887" cy="237744"/>
+          </a:xfrm>
+          <a:prstGeom prst="rect">
+            <a:avLst/>
+          </a:prstGeom>
+          <a:noFill/>
+        </p:spPr>
+        <p:txBody>
+          <a:bodyPr wrap="square" anchor="t" lIns="36576" rIns="36576" tIns="18288" bIns="18288">
+            <a:spAutoFit/>
+          </a:bodyPr>
+          <a:lstStyle/>
+          <a:p>
+            <a:pPr algn="l"/>
+            <a:r>
+              <a:rPr sz="1000" b="1">
+                <a:solidFill>
+                  <a:srgbClr val="1565C0"/>
+                </a:solidFill>
+                <a:latin typeface="Tahoma"/>
+              </a:rPr>
+              <a:t>โปรแกรมขายหน้าร้าน · VB6 v6.2412.1</a:t>
+            </a:r>
+          </a:p>
+        </p:txBody>
+      </p:sp>
+      <p:sp>
+        <p:nvSpPr>
+          <p:cNvPr id="10" name="TextBox 9"/>
+          <p:cNvSpPr txBox="1"/>
+          <p:nvPr/>
+        </p:nvSpPr>
+        <p:spPr>
+          <a:xfrm>
+            <a:off x="704088" y="2532888"/>
+            <a:ext cx="3657600" cy="274320"/>
+          </a:xfrm>
+          <a:prstGeom prst="rect">
+            <a:avLst/>
+          </a:prstGeom>
+          <a:noFill/>
+        </p:spPr>
+        <p:txBody>
+          <a:bodyPr wrap="square" anchor="t" lIns="36576" rIns="36576" tIns="18288" bIns="18288">
+            <a:spAutoFit/>
+          </a:bodyPr>
+          <a:lstStyle/>
+          <a:p>
+            <a:pPr algn="l"/>
+            <a:r>
+              <a:rPr sz="950" b="0">
+                <a:solidFill>
+                  <a:srgbClr val="5A6B7B"/>
+                </a:solidFill>
+                <a:latin typeface="Tahoma"/>
+              </a:rPr>
+              <a:t>•  อ่าน Master จาก Server</a:t>
+            </a:r>
+          </a:p>
+        </p:txBody>
+      </p:sp>
+      <p:sp>
+        <p:nvSpPr>
+          <p:cNvPr id="11" name="TextBox 10"/>
+          <p:cNvSpPr txBox="1"/>
+          <p:nvPr/>
+        </p:nvSpPr>
+        <p:spPr>
+          <a:xfrm>
+            <a:off x="704088" y="2843784"/>
+            <a:ext cx="3657600" cy="274320"/>
+          </a:xfrm>
+          <a:prstGeom prst="rect">
+            <a:avLst/>
+          </a:prstGeom>
+          <a:noFill/>
+        </p:spPr>
+        <p:txBody>
+          <a:bodyPr wrap="square" anchor="t" lIns="36576" rIns="36576" tIns="18288" bIns="18288">
+            <a:spAutoFit/>
+          </a:bodyPr>
+          <a:lstStyle/>
+          <a:p>
+            <a:pPr algn="l"/>
+            <a:r>
+              <a:rPr sz="950" b="0">
+                <a:solidFill>
+                  <a:srgbClr val="5A6B7B"/>
+                </a:solidFill>
+                <a:latin typeface="Tahoma"/>
+              </a:rPr>
+              <a:t>•  เขียนบิลลง TPSHD&lt;Tmn&gt; (StaDoc='2')</a:t>
+            </a:r>
+          </a:p>
+        </p:txBody>
+      </p:sp>
+      <p:sp>
+        <p:nvSpPr>
+          <p:cNvPr id="12" name="TextBox 11"/>
+          <p:cNvSpPr txBox="1"/>
+          <p:nvPr/>
+        </p:nvSpPr>
+        <p:spPr>
+          <a:xfrm>
+            <a:off x="704088" y="3154679"/>
+            <a:ext cx="3657600" cy="274320"/>
+          </a:xfrm>
+          <a:prstGeom prst="rect">
+            <a:avLst/>
+          </a:prstGeom>
+          <a:noFill/>
+        </p:spPr>
+        <p:txBody>
+          <a:bodyPr wrap="square" anchor="t" lIns="36576" rIns="36576" tIns="18288" bIns="18288">
+            <a:spAutoFit/>
+          </a:bodyPr>
+          <a:lstStyle/>
+          <a:p>
+            <a:pPr algn="l"/>
+            <a:r>
+              <a:rPr sz="950" b="0">
+                <a:solidFill>
+                  <a:srgbClr val="5A6B7B"/>
+                </a:solidFill>
+                <a:latin typeface="Tahoma"/>
+              </a:rPr>
+              <a:t>•  จ่ายเงิน+พิมพ์ใบเสร็จ -&gt; StaDoc='1'</a:t>
+            </a:r>
+          </a:p>
+        </p:txBody>
+      </p:sp>
+      <p:sp>
+        <p:nvSpPr>
+          <p:cNvPr id="13" name="Rounded Rectangle 12"/>
+          <p:cNvSpPr/>
+          <p:nvPr/>
+        </p:nvSpPr>
+        <p:spPr>
+          <a:xfrm>
+            <a:off x="4599432" y="1783080"/>
+            <a:ext cx="4041648" cy="1783080"/>
+          </a:xfrm>
+          <a:prstGeom prst="roundRect">
+            <a:avLst/>
+          </a:prstGeom>
+          <a:solidFill>
+            <a:srgbClr val="F3E5F5"/>
+          </a:solidFill>
+          <a:ln>
+            <a:noFill/>
+          </a:ln>
+          <a:effectLst/>
+        </p:spPr>
+        <p:style>
+          <a:lnRef idx="1">
+            <a:schemeClr val="accent1"/>
+          </a:lnRef>
+          <a:fillRef idx="3">
+            <a:schemeClr val="accent1"/>
+          </a:fillRef>
+          <a:effectRef idx="2">
+            <a:schemeClr val="accent1"/>
+          </a:effectRef>
+          <a:fontRef idx="minor">
+            <a:schemeClr val="lt1"/>
+          </a:fontRef>
+        </p:style>
+        <p:txBody>
+          <a:bodyPr rtlCol="0" anchor="ctr"/>
+          <a:lstStyle/>
+          <a:p>
+            <a:pPr algn="ctr"/>
+          </a:p>
+        </p:txBody>
+      </p:sp>
+      <p:sp>
+        <p:nvSpPr>
+          <p:cNvPr id="14" name="Rectangle 13"/>
+          <p:cNvSpPr/>
+          <p:nvPr/>
+        </p:nvSpPr>
+        <p:spPr>
+          <a:xfrm>
+            <a:off x="4599432" y="1783080"/>
+            <a:ext cx="82296" cy="1783080"/>
+          </a:xfrm>
+          <a:prstGeom prst="rect">
+            <a:avLst/>
+          </a:prstGeom>
+          <a:solidFill>
+            <a:srgbClr val="6A1B9A"/>
+          </a:solidFill>
+          <a:ln>
+            <a:noFill/>
+          </a:ln>
+          <a:effectLst/>
+        </p:spPr>
+        <p:style>
+          <a:lnRef idx="1">
+            <a:schemeClr val="accent1"/>
+          </a:lnRef>
+          <a:fillRef idx="3">
+            <a:schemeClr val="accent1"/>
+          </a:fillRef>
+          <a:effectRef idx="2">
+            <a:schemeClr val="accent1"/>
+          </a:effectRef>
+          <a:fontRef idx="minor">
+            <a:schemeClr val="lt1"/>
+          </a:fontRef>
+        </p:style>
+        <p:txBody>
+          <a:bodyPr rtlCol="0" anchor="ctr"/>
+          <a:lstStyle/>
+          <a:p>
+            <a:pPr algn="ctr"/>
+          </a:p>
+        </p:txBody>
+      </p:sp>
+      <p:sp>
+        <p:nvSpPr>
+          <p:cNvPr id="15" name="TextBox 14"/>
+          <p:cNvSpPr txBox="1"/>
+          <p:nvPr/>
+        </p:nvSpPr>
+        <p:spPr>
+          <a:xfrm>
+            <a:off x="4800600" y="1911095"/>
+            <a:ext cx="3675887" cy="292608"/>
+          </a:xfrm>
+          <a:prstGeom prst="rect">
+            <a:avLst/>
+          </a:prstGeom>
+          <a:noFill/>
+        </p:spPr>
+        <p:txBody>
+          <a:bodyPr wrap="square" anchor="t" lIns="36576" rIns="36576" tIns="18288" bIns="18288">
+            <a:spAutoFit/>
+          </a:bodyPr>
+          <a:lstStyle/>
+          <a:p>
+            <a:pPr algn="l"/>
+            <a:r>
+              <a:rPr sz="1400" b="1">
+                <a:solidFill>
+                  <a:srgbClr val="1A2733"/>
+                </a:solidFill>
+                <a:latin typeface="Tahoma"/>
+              </a:rPr>
+              <a:t>ServiceTransfer (Consumer)</a:t>
+            </a:r>
+          </a:p>
+        </p:txBody>
+      </p:sp>
+      <p:sp>
+        <p:nvSpPr>
+          <p:cNvPr id="16" name="TextBox 15"/>
+          <p:cNvSpPr txBox="1"/>
+          <p:nvPr/>
+        </p:nvSpPr>
+        <p:spPr>
+          <a:xfrm>
+            <a:off x="4800600" y="2221991"/>
+            <a:ext cx="3675887" cy="237744"/>
+          </a:xfrm>
+          <a:prstGeom prst="rect">
+            <a:avLst/>
+          </a:prstGeom>
+          <a:noFill/>
+        </p:spPr>
+        <p:txBody>
+          <a:bodyPr wrap="square" anchor="t" lIns="36576" rIns="36576" tIns="18288" bIns="18288">
+            <a:spAutoFit/>
+          </a:bodyPr>
+          <a:lstStyle/>
+          <a:p>
+            <a:pPr algn="l"/>
+            <a:r>
+              <a:rPr sz="1000" b="1">
+                <a:solidFill>
+                  <a:srgbClr val="6A1B9A"/>
+                </a:solidFill>
+                <a:latin typeface="Tahoma"/>
+              </a:rPr>
+              <a:t>เอเจนต์ซิงค์ · Timer 500ms</a:t>
+            </a:r>
+          </a:p>
+        </p:txBody>
+      </p:sp>
+      <p:sp>
+        <p:nvSpPr>
+          <p:cNvPr id="17" name="TextBox 16"/>
+          <p:cNvSpPr txBox="1"/>
+          <p:nvPr/>
+        </p:nvSpPr>
+        <p:spPr>
+          <a:xfrm>
+            <a:off x="4800600" y="2532888"/>
+            <a:ext cx="3657600" cy="274320"/>
+          </a:xfrm>
+          <a:prstGeom prst="rect">
+            <a:avLst/>
+          </a:prstGeom>
+          <a:noFill/>
+        </p:spPr>
+        <p:txBody>
+          <a:bodyPr wrap="square" anchor="t" lIns="36576" rIns="36576" tIns="18288" bIns="18288">
+            <a:spAutoFit/>
+          </a:bodyPr>
+          <a:lstStyle/>
+          <a:p>
+            <a:pPr algn="l"/>
+            <a:r>
+              <a:rPr sz="950" b="0">
+                <a:solidFill>
+                  <a:srgbClr val="5A6B7B"/>
+                </a:solidFill>
+                <a:latin typeface="Tahoma"/>
+              </a:rPr>
+              <a:t>•  poll FTStaSentOnOff='0'</a:t>
+            </a:r>
+          </a:p>
+        </p:txBody>
+      </p:sp>
+      <p:sp>
+        <p:nvSpPr>
+          <p:cNvPr id="18" name="TextBox 17"/>
+          <p:cNvSpPr txBox="1"/>
+          <p:nvPr/>
+        </p:nvSpPr>
+        <p:spPr>
+          <a:xfrm>
+            <a:off x="4800600" y="2843784"/>
+            <a:ext cx="3657600" cy="274320"/>
+          </a:xfrm>
+          <a:prstGeom prst="rect">
+            <a:avLst/>
+          </a:prstGeom>
+          <a:noFill/>
+        </p:spPr>
+        <p:txBody>
+          <a:bodyPr wrap="square" anchor="t" lIns="36576" rIns="36576" tIns="18288" bIns="18288">
+            <a:spAutoFit/>
+          </a:bodyPr>
+          <a:lstStyle/>
+          <a:p>
+            <a:pPr algn="l"/>
+            <a:r>
+              <a:rPr sz="950" b="0">
+                <a:solidFill>
+                  <a:srgbClr val="5A6B7B"/>
+                </a:solidFill>
+                <a:latin typeface="Tahoma"/>
+              </a:rPr>
+              <a:t>•  Tokenize -&gt; push ขึ้น Central DB</a:t>
+            </a:r>
+          </a:p>
+        </p:txBody>
+      </p:sp>
+      <p:sp>
+        <p:nvSpPr>
+          <p:cNvPr id="19" name="TextBox 18"/>
+          <p:cNvSpPr txBox="1"/>
+          <p:nvPr/>
+        </p:nvSpPr>
+        <p:spPr>
+          <a:xfrm>
+            <a:off x="4800600" y="3154679"/>
+            <a:ext cx="3657600" cy="274320"/>
+          </a:xfrm>
+          <a:prstGeom prst="rect">
+            <a:avLst/>
+          </a:prstGeom>
+          <a:noFill/>
+        </p:spPr>
+        <p:txBody>
+          <a:bodyPr wrap="square" anchor="t" lIns="36576" rIns="36576" tIns="18288" bIns="18288">
+            <a:spAutoFit/>
+          </a:bodyPr>
+          <a:lstStyle/>
+          <a:p>
+            <a:pPr algn="l"/>
+            <a:r>
+              <a:rPr sz="950" b="0">
+                <a:solidFill>
+                  <a:srgbClr val="5A6B7B"/>
+                </a:solidFill>
+                <a:latin typeface="Tahoma"/>
+              </a:rPr>
+              <a:t>•  set FTStaSentOnOff='1' (synced)</a:t>
+            </a:r>
+          </a:p>
+        </p:txBody>
+      </p:sp>
+      <p:sp>
+        <p:nvSpPr>
+          <p:cNvPr id="20" name="Rounded Rectangle 19"/>
+          <p:cNvSpPr/>
+          <p:nvPr/>
+        </p:nvSpPr>
+        <p:spPr>
+          <a:xfrm>
+            <a:off x="502920" y="3703320"/>
+            <a:ext cx="8138160" cy="1078992"/>
+          </a:xfrm>
+          <a:prstGeom prst="roundRect">
+            <a:avLst/>
+          </a:prstGeom>
+          <a:solidFill>
+            <a:srgbClr val="F4F7FA"/>
+          </a:solidFill>
+          <a:ln>
+            <a:noFill/>
+          </a:ln>
+          <a:effectLst/>
+        </p:spPr>
+        <p:style>
+          <a:lnRef idx="1">
+            <a:schemeClr val="accent1"/>
+          </a:lnRef>
+          <a:fillRef idx="3">
+            <a:schemeClr val="accent1"/>
+          </a:fillRef>
+          <a:effectRef idx="2">
+            <a:schemeClr val="accent1"/>
+          </a:effectRef>
+          <a:fontRef idx="minor">
+            <a:schemeClr val="lt1"/>
+          </a:fontRef>
+        </p:style>
+        <p:txBody>
+          <a:bodyPr rtlCol="0" anchor="ctr"/>
+          <a:lstStyle/>
+          <a:p>
+            <a:pPr algn="ctr"/>
+          </a:p>
+        </p:txBody>
+      </p:sp>
+      <p:sp>
+        <p:nvSpPr>
+          <p:cNvPr id="21" name="TextBox 20"/>
+          <p:cNvSpPr txBox="1"/>
+          <p:nvPr/>
+        </p:nvSpPr>
+        <p:spPr>
+          <a:xfrm>
+            <a:off x="685800" y="3803904"/>
+            <a:ext cx="7772400" cy="274320"/>
+          </a:xfrm>
+          <a:prstGeom prst="rect">
+            <a:avLst/>
+          </a:prstGeom>
+          <a:noFill/>
+        </p:spPr>
+        <p:txBody>
+          <a:bodyPr wrap="square" anchor="t" lIns="36576" rIns="36576" tIns="18288" bIns="18288">
+            <a:spAutoFit/>
+          </a:bodyPr>
+          <a:lstStyle/>
+          <a:p>
+            <a:pPr algn="l"/>
+            <a:r>
+              <a:rPr sz="1050" b="1">
+                <a:solidFill>
+                  <a:srgbClr val="1A2733"/>
+                </a:solidFill>
+                <a:latin typeface="Tahoma"/>
+              </a:rPr>
+              <a:t>Orchestration:  POSFront.Sub Main เปิด ServiceOnOff · ServiceAutoReplicate · ServiceAutoClear · ServiceTranfer</a:t>
+            </a:r>
+          </a:p>
+        </p:txBody>
+      </p:sp>
+      <p:sp>
+        <p:nvSpPr>
+          <p:cNvPr id="22" name="TextBox 21"/>
+          <p:cNvSpPr txBox="1"/>
+          <p:nvPr/>
+        </p:nvSpPr>
+        <p:spPr>
+          <a:xfrm>
+            <a:off x="685800" y="4133087"/>
+            <a:ext cx="7772400" cy="566928"/>
+          </a:xfrm>
+          <a:prstGeom prst="rect">
+            <a:avLst/>
+          </a:prstGeom>
+          <a:noFill/>
+        </p:spPr>
+        <p:txBody>
+          <a:bodyPr wrap="square" anchor="t" lIns="36576" rIns="36576" tIns="18288" bIns="18288">
+            <a:spAutoFit/>
+          </a:bodyPr>
+          <a:lstStyle/>
+          <a:p>
+            <a:pPr algn="l"/>
+            <a:r>
+              <a:rPr sz="950" b="0">
+                <a:solidFill>
+                  <a:srgbClr val="5A6B7B"/>
+                </a:solidFill>
+                <a:latin typeface="Tahoma"/>
+              </a:rPr>
+              <a:t>Handshake:  FTShdStaDoc ('2'-&gt;'1') = POSFront  |  FTStaSentOnOff ('0'-&gt;'1') = ServiceTransfer  |  Trigger TRG_Tmp2Sale&lt;Tmn&gt; -&gt; STP_PRCxTmp2Sale ย้ายบิลเข้า TPSTSal*</a:t>
+            </a:r>
+          </a:p>
+        </p:txBody>
+      </p:sp>
+      <p:sp>
+        <p:nvSpPr>
+          <p:cNvPr id="23" name="TextBox 22"/>
+          <p:cNvSpPr txBox="1"/>
+          <p:nvPr/>
+        </p:nvSpPr>
+        <p:spPr>
+          <a:xfrm>
+            <a:off x="0" y="5074920"/>
+            <a:ext cx="274320" cy="91440"/>
+          </a:xfrm>
+          <a:prstGeom prst="rect">
+            <a:avLst/>
+          </a:prstGeom>
+          <a:noFill/>
+        </p:spPr>
+        <p:txBody>
+          <a:bodyPr wrap="square" anchor="t" lIns="36576" rIns="36576" tIns="18288" bIns="18288">
+            <a:spAutoFit/>
+          </a:bodyPr>
+          <a:lstStyle/>
+          <a:p>
+            <a:pPr algn="l"/>
+            <a:r>
+              <a:rPr sz="100" b="0">
+                <a:solidFill>
+                  <a:srgbClr val="FFFFFF"/>
+                </a:solidFill>
+                <a:latin typeface="Tahoma"/>
+              </a:rPr>
+              <a:t>​PF</a:t>
+            </a:r>
           </a:p>
         </p:txBody>
       </p:sp>
@@ -12992,6 +14139,10 @@
             <a:prstDash val="solid"/>
           </a:ln>
         </p:spPr>
+        <p:txBody>
+          <a:bodyPr/>
+          <a:p/>
+        </p:txBody>
       </p:sp>
       <p:sp>
         <p:nvSpPr>
@@ -13014,6 +14165,10 @@
           </a:solidFill>
           <a:ln/>
         </p:spPr>
+        <p:txBody>
+          <a:bodyPr/>
+          <a:p/>
+        </p:txBody>
       </p:sp>
       <p:sp>
         <p:nvSpPr>
@@ -13158,6 +14313,10 @@
             <a:prstDash val="solid"/>
           </a:ln>
         </p:spPr>
+        <p:txBody>
+          <a:bodyPr/>
+          <a:p/>
+        </p:txBody>
       </p:sp>
       <p:sp>
         <p:nvSpPr>
@@ -13180,6 +14339,10 @@
           </a:solidFill>
           <a:ln/>
         </p:spPr>
+        <p:txBody>
+          <a:bodyPr/>
+          <a:p/>
+        </p:txBody>
       </p:sp>
       <p:sp>
         <p:nvSpPr>
@@ -13324,6 +14487,10 @@
             <a:prstDash val="solid"/>
           </a:ln>
         </p:spPr>
+        <p:txBody>
+          <a:bodyPr/>
+          <a:p/>
+        </p:txBody>
       </p:sp>
       <p:sp>
         <p:nvSpPr>
@@ -13346,6 +14513,10 @@
           </a:solidFill>
           <a:ln/>
         </p:spPr>
+        <p:txBody>
+          <a:bodyPr/>
+          <a:p/>
+        </p:txBody>
       </p:sp>
       <p:sp>
         <p:nvSpPr>
@@ -13490,6 +14661,10 @@
             <a:prstDash val="solid"/>
           </a:ln>
         </p:spPr>
+        <p:txBody>
+          <a:bodyPr/>
+          <a:p/>
+        </p:txBody>
       </p:sp>
       <p:sp>
         <p:nvSpPr>
@@ -13512,6 +14687,10 @@
           </a:solidFill>
           <a:ln/>
         </p:spPr>
+        <p:txBody>
+          <a:bodyPr/>
+          <a:p/>
+        </p:txBody>
       </p:sp>
       <p:sp>
         <p:nvSpPr>
@@ -13656,6 +14835,10 @@
             <a:prstDash val="solid"/>
           </a:ln>
         </p:spPr>
+        <p:txBody>
+          <a:bodyPr/>
+          <a:p/>
+        </p:txBody>
       </p:sp>
       <p:sp>
         <p:nvSpPr>
@@ -13678,6 +14861,10 @@
           </a:solidFill>
           <a:ln/>
         </p:spPr>
+        <p:txBody>
+          <a:bodyPr/>
+          <a:p/>
+        </p:txBody>
       </p:sp>
       <p:sp>
         <p:nvSpPr>
@@ -13822,6 +15009,10 @@
             <a:prstDash val="solid"/>
           </a:ln>
         </p:spPr>
+        <p:txBody>
+          <a:bodyPr/>
+          <a:p/>
+        </p:txBody>
       </p:sp>
       <p:sp>
         <p:nvSpPr>
@@ -13844,6 +15035,10 @@
           </a:solidFill>
           <a:ln/>
         </p:spPr>
+        <p:txBody>
+          <a:bodyPr/>
+          <a:p/>
+        </p:txBody>
       </p:sp>
       <p:sp>
         <p:nvSpPr>
@@ -14341,6 +15536,10 @@
             </a:outerShdw>
           </a:effectLst>
         </p:spPr>
+        <p:txBody>
+          <a:bodyPr/>
+          <a:p/>
+        </p:txBody>
       </p:sp>
       <p:sp>
         <p:nvSpPr>
@@ -14492,6 +15691,10 @@
             </a:outerShdw>
           </a:effectLst>
         </p:spPr>
+        <p:txBody>
+          <a:bodyPr/>
+          <a:p/>
+        </p:txBody>
       </p:sp>
       <p:sp>
         <p:nvSpPr>
@@ -14643,6 +15846,10 @@
             </a:outerShdw>
           </a:effectLst>
         </p:spPr>
+        <p:txBody>
+          <a:bodyPr/>
+          <a:p/>
+        </p:txBody>
       </p:sp>
       <p:sp>
         <p:nvSpPr>
@@ -14794,6 +16001,10 @@
             </a:outerShdw>
           </a:effectLst>
         </p:spPr>
+        <p:txBody>
+          <a:bodyPr/>
+          <a:p/>
+        </p:txBody>
       </p:sp>
       <p:sp>
         <p:nvSpPr>
@@ -14938,6 +16149,10 @@
             <a:prstDash val="solid"/>
           </a:ln>
         </p:spPr>
+        <p:txBody>
+          <a:bodyPr/>
+          <a:p/>
+        </p:txBody>
       </p:sp>
       <p:sp>
         <p:nvSpPr>
@@ -15216,6 +16431,10 @@
             </a:outerShdw>
           </a:effectLst>
         </p:spPr>
+        <p:txBody>
+          <a:bodyPr/>
+          <a:p/>
+        </p:txBody>
       </p:sp>
       <p:sp>
         <p:nvSpPr>
@@ -15282,6 +16501,10 @@
             <a:prstDash val="solid"/>
           </a:ln>
         </p:spPr>
+        <p:txBody>
+          <a:bodyPr/>
+          <a:p/>
+        </p:txBody>
       </p:sp>
       <p:sp>
         <p:nvSpPr>
@@ -15387,6 +16610,10 @@
             <a:prstDash val="solid"/>
           </a:ln>
         </p:spPr>
+        <p:txBody>
+          <a:bodyPr/>
+          <a:p/>
+        </p:txBody>
       </p:sp>
       <p:sp>
         <p:nvSpPr>
@@ -15526,6 +16753,10 @@
             <a:prstDash val="solid"/>
           </a:ln>
         </p:spPr>
+        <p:txBody>
+          <a:bodyPr/>
+          <a:p/>
+        </p:txBody>
       </p:sp>
       <p:sp>
         <p:nvSpPr>
@@ -15711,6 +16942,10 @@
             </a:outerShdw>
           </a:effectLst>
         </p:spPr>
+        <p:txBody>
+          <a:bodyPr/>
+          <a:p/>
+        </p:txBody>
       </p:sp>
       <p:sp>
         <p:nvSpPr>
@@ -15777,6 +17012,10 @@
             <a:prstDash val="solid"/>
           </a:ln>
         </p:spPr>
+        <p:txBody>
+          <a:bodyPr/>
+          <a:p/>
+        </p:txBody>
       </p:sp>
       <p:sp>
         <p:nvSpPr>
@@ -15916,6 +17155,10 @@
             <a:prstDash val="solid"/>
           </a:ln>
         </p:spPr>
+        <p:txBody>
+          <a:bodyPr/>
+          <a:p/>
+        </p:txBody>
       </p:sp>
       <p:sp>
         <p:nvSpPr>
@@ -16062,6 +17305,10 @@
             </a:outerShdw>
           </a:effectLst>
         </p:spPr>
+        <p:txBody>
+          <a:bodyPr/>
+          <a:p/>
+        </p:txBody>
       </p:sp>
       <p:sp>
         <p:nvSpPr>
@@ -16194,6 +17441,10 @@
           </a:solidFill>
           <a:ln/>
         </p:spPr>
+        <p:txBody>
+          <a:bodyPr/>
+          <a:p/>
+        </p:txBody>
       </p:sp>
       <p:sp>
         <p:nvSpPr>
@@ -16253,6 +17504,10 @@
           </a:solidFill>
           <a:ln/>
         </p:spPr>
+        <p:txBody>
+          <a:bodyPr/>
+          <a:p/>
+        </p:txBody>
       </p:sp>
       <p:sp>
         <p:nvSpPr>
@@ -16312,6 +17567,10 @@
           </a:solidFill>
           <a:ln/>
         </p:spPr>
+        <p:txBody>
+          <a:bodyPr/>
+          <a:p/>
+        </p:txBody>
       </p:sp>
       <p:sp>
         <p:nvSpPr>
@@ -16563,6 +17822,10 @@
             <a:prstDash val="solid"/>
           </a:ln>
         </p:spPr>
+        <p:txBody>
+          <a:bodyPr/>
+          <a:p/>
+        </p:txBody>
       </p:sp>
       <p:sp>
         <p:nvSpPr>
@@ -16585,6 +17848,10 @@
           </a:solidFill>
           <a:ln/>
         </p:spPr>
+        <p:txBody>
+          <a:bodyPr/>
+          <a:p/>
+        </p:txBody>
       </p:sp>
       <p:sp>
         <p:nvSpPr>
@@ -16729,6 +17996,10 @@
             <a:prstDash val="solid"/>
           </a:ln>
         </p:spPr>
+        <p:txBody>
+          <a:bodyPr/>
+          <a:p/>
+        </p:txBody>
       </p:sp>
       <p:sp>
         <p:nvSpPr>
@@ -16751,6 +18022,10 @@
           </a:solidFill>
           <a:ln/>
         </p:spPr>
+        <p:txBody>
+          <a:bodyPr/>
+          <a:p/>
+        </p:txBody>
       </p:sp>
       <p:sp>
         <p:nvSpPr>
@@ -16895,6 +18170,10 @@
             <a:prstDash val="solid"/>
           </a:ln>
         </p:spPr>
+        <p:txBody>
+          <a:bodyPr/>
+          <a:p/>
+        </p:txBody>
       </p:sp>
       <p:sp>
         <p:nvSpPr>
@@ -16917,6 +18196,10 @@
           </a:solidFill>
           <a:ln/>
         </p:spPr>
+        <p:txBody>
+          <a:bodyPr/>
+          <a:p/>
+        </p:txBody>
       </p:sp>
       <p:sp>
         <p:nvSpPr>
@@ -17061,6 +18344,10 @@
             <a:prstDash val="solid"/>
           </a:ln>
         </p:spPr>
+        <p:txBody>
+          <a:bodyPr/>
+          <a:p/>
+        </p:txBody>
       </p:sp>
       <p:sp>
         <p:nvSpPr>
@@ -17083,6 +18370,10 @@
           </a:solidFill>
           <a:ln/>
         </p:spPr>
+        <p:txBody>
+          <a:bodyPr/>
+          <a:p/>
+        </p:txBody>
       </p:sp>
       <p:sp>
         <p:nvSpPr>
@@ -17227,6 +18518,10 @@
             <a:prstDash val="solid"/>
           </a:ln>
         </p:spPr>
+        <p:txBody>
+          <a:bodyPr/>
+          <a:p/>
+        </p:txBody>
       </p:sp>
       <p:sp>
         <p:nvSpPr>
@@ -17249,6 +18544,10 @@
           </a:solidFill>
           <a:ln/>
         </p:spPr>
+        <p:txBody>
+          <a:bodyPr/>
+          <a:p/>
+        </p:txBody>
       </p:sp>
       <p:sp>
         <p:nvSpPr>
@@ -17393,6 +18692,10 @@
             <a:prstDash val="solid"/>
           </a:ln>
         </p:spPr>
+        <p:txBody>
+          <a:bodyPr/>
+          <a:p/>
+        </p:txBody>
       </p:sp>
       <p:sp>
         <p:nvSpPr>
@@ -17415,6 +18718,10 @@
           </a:solidFill>
           <a:ln/>
         </p:spPr>
+        <p:txBody>
+          <a:bodyPr/>
+          <a:p/>
+        </p:txBody>
       </p:sp>
       <p:sp>
         <p:nvSpPr>
@@ -17559,6 +18866,10 @@
             <a:prstDash val="solid"/>
           </a:ln>
         </p:spPr>
+        <p:txBody>
+          <a:bodyPr/>
+          <a:p/>
+        </p:txBody>
       </p:sp>
       <p:sp>
         <p:nvSpPr>
@@ -17581,6 +18892,10 @@
           </a:solidFill>
           <a:ln/>
         </p:spPr>
+        <p:txBody>
+          <a:bodyPr/>
+          <a:p/>
+        </p:txBody>
       </p:sp>
       <p:sp>
         <p:nvSpPr>
@@ -17725,6 +19040,10 @@
             <a:prstDash val="solid"/>
           </a:ln>
         </p:spPr>
+        <p:txBody>
+          <a:bodyPr/>
+          <a:p/>
+        </p:txBody>
       </p:sp>
       <p:sp>
         <p:nvSpPr>
@@ -17747,6 +19066,10 @@
           </a:solidFill>
           <a:ln/>
         </p:spPr>
+        <p:txBody>
+          <a:bodyPr/>
+          <a:p/>
+        </p:txBody>
       </p:sp>
       <p:sp>
         <p:nvSpPr>
@@ -18083,6 +19406,10 @@
             </a:outerShdw>
           </a:effectLst>
         </p:spPr>
+        <p:txBody>
+          <a:bodyPr/>
+          <a:p/>
+        </p:txBody>
       </p:sp>
       <p:sp>
         <p:nvSpPr>
@@ -18205,6 +19532,10 @@
             <a:prstDash val="solid"/>
           </a:ln>
         </p:spPr>
+        <p:txBody>
+          <a:bodyPr/>
+          <a:p/>
+        </p:txBody>
       </p:sp>
       <p:sp>
         <p:nvSpPr>
@@ -18306,6 +19637,10 @@
             <a:prstDash val="solid"/>
           </a:ln>
         </p:spPr>
+        <p:txBody>
+          <a:bodyPr/>
+          <a:p/>
+        </p:txBody>
       </p:sp>
       <p:sp>
         <p:nvSpPr>
@@ -18333,6 +19668,10 @@
             <a:prstDash val="solid"/>
           </a:ln>
         </p:spPr>
+        <p:txBody>
+          <a:bodyPr/>
+          <a:p/>
+        </p:txBody>
       </p:sp>
       <p:sp>
         <p:nvSpPr>
@@ -18434,6 +19773,10 @@
             <a:prstDash val="solid"/>
           </a:ln>
         </p:spPr>
+        <p:txBody>
+          <a:bodyPr/>
+          <a:p/>
+        </p:txBody>
       </p:sp>
       <p:sp>
         <p:nvSpPr>
@@ -18461,6 +19804,10 @@
             <a:prstDash val="solid"/>
           </a:ln>
         </p:spPr>
+        <p:txBody>
+          <a:bodyPr/>
+          <a:p/>
+        </p:txBody>
       </p:sp>
       <p:sp>
         <p:nvSpPr>
@@ -18562,6 +19909,10 @@
             <a:prstDash val="solid"/>
           </a:ln>
         </p:spPr>
+        <p:txBody>
+          <a:bodyPr/>
+          <a:p/>
+        </p:txBody>
       </p:sp>
       <p:sp>
         <p:nvSpPr>
@@ -18589,6 +19940,10 @@
             <a:prstDash val="solid"/>
           </a:ln>
         </p:spPr>
+        <p:txBody>
+          <a:bodyPr/>
+          <a:p/>
+        </p:txBody>
       </p:sp>
       <p:sp>
         <p:nvSpPr>
@@ -18690,6 +20045,10 @@
             <a:prstDash val="solid"/>
           </a:ln>
         </p:spPr>
+        <p:txBody>
+          <a:bodyPr/>
+          <a:p/>
+        </p:txBody>
       </p:sp>
       <p:sp>
         <p:nvSpPr>
@@ -18763,6 +20122,10 @@
             </a:outerShdw>
           </a:effectLst>
         </p:spPr>
+        <p:txBody>
+          <a:bodyPr/>
+          <a:p/>
+        </p:txBody>
       </p:sp>
       <p:sp>
         <p:nvSpPr>
@@ -18885,6 +20248,10 @@
             <a:prstDash val="solid"/>
           </a:ln>
         </p:spPr>
+        <p:txBody>
+          <a:bodyPr/>
+          <a:p/>
+        </p:txBody>
       </p:sp>
       <p:sp>
         <p:nvSpPr>
@@ -18986,6 +20353,10 @@
             <a:prstDash val="solid"/>
           </a:ln>
         </p:spPr>
+        <p:txBody>
+          <a:bodyPr/>
+          <a:p/>
+        </p:txBody>
       </p:sp>
       <p:sp>
         <p:nvSpPr>
@@ -19009,6 +20380,10 @@
             <a:prstDash val="solid"/>
           </a:ln>
         </p:spPr>
+        <p:txBody>
+          <a:bodyPr/>
+          <a:p/>
+        </p:txBody>
       </p:sp>
       <p:sp>
         <p:nvSpPr>
@@ -19032,6 +20407,10 @@
             <a:prstDash val="solid"/>
           </a:ln>
         </p:spPr>
+        <p:txBody>
+          <a:bodyPr/>
+          <a:p/>
+        </p:txBody>
       </p:sp>
       <p:sp>
         <p:nvSpPr>
@@ -19055,6 +20434,10 @@
             <a:prstDash val="solid"/>
           </a:ln>
         </p:spPr>
+        <p:txBody>
+          <a:bodyPr/>
+          <a:p/>
+        </p:txBody>
       </p:sp>
       <p:sp>
         <p:nvSpPr>
@@ -19128,6 +20511,10 @@
             </a:outerShdw>
           </a:effectLst>
         </p:spPr>
+        <p:txBody>
+          <a:bodyPr/>
+          <a:p/>
+        </p:txBody>
       </p:sp>
       <p:sp>
         <p:nvSpPr>
@@ -19267,6 +20654,10 @@
             <a:prstDash val="solid"/>
           </a:ln>
         </p:spPr>
+        <p:txBody>
+          <a:bodyPr/>
+          <a:p/>
+        </p:txBody>
       </p:sp>
       <p:sp>
         <p:nvSpPr>
@@ -19610,6 +21001,10 @@
             <a:prstDash val="solid"/>
           </a:ln>
         </p:spPr>
+        <p:txBody>
+          <a:bodyPr/>
+          <a:p/>
+        </p:txBody>
       </p:sp>
       <p:sp>
         <p:nvSpPr>
@@ -19676,6 +21071,10 @@
             <a:prstDash val="solid"/>
           </a:ln>
         </p:spPr>
+        <p:txBody>
+          <a:bodyPr/>
+          <a:p/>
+        </p:txBody>
       </p:sp>
       <p:sp>
         <p:nvSpPr>
@@ -19749,6 +21148,10 @@
           </a:solidFill>
           <a:ln/>
         </p:spPr>
+        <p:txBody>
+          <a:bodyPr/>
+          <a:p/>
+        </p:txBody>
       </p:sp>
       <p:sp>
         <p:nvSpPr>
@@ -19776,6 +21179,10 @@
             <a:prstDash val="solid"/>
           </a:ln>
         </p:spPr>
+        <p:txBody>
+          <a:bodyPr/>
+          <a:p/>
+        </p:txBody>
       </p:sp>
       <p:sp>
         <p:nvSpPr>
@@ -19842,6 +21249,10 @@
             <a:prstDash val="solid"/>
           </a:ln>
         </p:spPr>
+        <p:txBody>
+          <a:bodyPr/>
+          <a:p/>
+        </p:txBody>
       </p:sp>
       <p:sp>
         <p:nvSpPr>
@@ -19915,6 +21326,10 @@
           </a:solidFill>
           <a:ln/>
         </p:spPr>
+        <p:txBody>
+          <a:bodyPr/>
+          <a:p/>
+        </p:txBody>
       </p:sp>
       <p:sp>
         <p:nvSpPr>
@@ -19942,6 +21357,10 @@
             <a:prstDash val="solid"/>
           </a:ln>
         </p:spPr>
+        <p:txBody>
+          <a:bodyPr/>
+          <a:p/>
+        </p:txBody>
       </p:sp>
       <p:sp>
         <p:nvSpPr>
@@ -20008,6 +21427,10 @@
             <a:prstDash val="solid"/>
           </a:ln>
         </p:spPr>
+        <p:txBody>
+          <a:bodyPr/>
+          <a:p/>
+        </p:txBody>
       </p:sp>
       <p:sp>
         <p:nvSpPr>
@@ -20081,6 +21504,10 @@
           </a:solidFill>
           <a:ln/>
         </p:spPr>
+        <p:txBody>
+          <a:bodyPr/>
+          <a:p/>
+        </p:txBody>
       </p:sp>
       <p:sp>
         <p:nvSpPr>
@@ -20108,6 +21535,10 @@
             <a:prstDash val="solid"/>
           </a:ln>
         </p:spPr>
+        <p:txBody>
+          <a:bodyPr/>
+          <a:p/>
+        </p:txBody>
       </p:sp>
       <p:sp>
         <p:nvSpPr>
@@ -20174,6 +21605,10 @@
             <a:prstDash val="solid"/>
           </a:ln>
         </p:spPr>
+        <p:txBody>
+          <a:bodyPr/>
+          <a:p/>
+        </p:txBody>
       </p:sp>
       <p:sp>
         <p:nvSpPr>
@@ -20247,6 +21682,10 @@
           </a:solidFill>
           <a:ln/>
         </p:spPr>
+        <p:txBody>
+          <a:bodyPr/>
+          <a:p/>
+        </p:txBody>
       </p:sp>
       <p:sp>
         <p:nvSpPr>
@@ -20274,6 +21713,10 @@
             <a:prstDash val="solid"/>
           </a:ln>
         </p:spPr>
+        <p:txBody>
+          <a:bodyPr/>
+          <a:p/>
+        </p:txBody>
       </p:sp>
       <p:sp>
         <p:nvSpPr>
@@ -20340,6 +21783,10 @@
             <a:prstDash val="solid"/>
           </a:ln>
         </p:spPr>
+        <p:txBody>
+          <a:bodyPr/>
+          <a:p/>
+        </p:txBody>
       </p:sp>
       <p:sp>
         <p:nvSpPr>
@@ -20413,6 +21860,10 @@
           </a:solidFill>
           <a:ln/>
         </p:spPr>
+        <p:txBody>
+          <a:bodyPr/>
+          <a:p/>
+        </p:txBody>
       </p:sp>
       <p:sp>
         <p:nvSpPr>
@@ -20440,6 +21891,10 @@
             <a:prstDash val="solid"/>
           </a:ln>
         </p:spPr>
+        <p:txBody>
+          <a:bodyPr/>
+          <a:p/>
+        </p:txBody>
       </p:sp>
       <p:sp>
         <p:nvSpPr>
@@ -20506,6 +21961,10 @@
             <a:prstDash val="solid"/>
           </a:ln>
         </p:spPr>
+        <p:txBody>
+          <a:bodyPr/>
+          <a:p/>
+        </p:txBody>
       </p:sp>
       <p:sp>
         <p:nvSpPr>
@@ -20593,6 +22052,10 @@
             </a:outerShdw>
           </a:effectLst>
         </p:spPr>
+        <p:txBody>
+          <a:bodyPr/>
+          <a:p/>
+        </p:txBody>
       </p:sp>
       <p:sp>
         <p:nvSpPr>
@@ -21199,6 +22662,10 @@
           </a:solidFill>
           <a:ln/>
         </p:spPr>
+        <p:txBody>
+          <a:bodyPr/>
+          <a:p/>
+        </p:txBody>
       </p:sp>
       <p:sp>
         <p:nvSpPr>
@@ -21304,6 +22771,10 @@
             <a:prstDash val="solid"/>
           </a:ln>
         </p:spPr>
+        <p:txBody>
+          <a:bodyPr/>
+          <a:p/>
+        </p:txBody>
       </p:sp>
       <p:sp>
         <p:nvSpPr>
@@ -21363,6 +22834,10 @@
           </a:solidFill>
           <a:ln/>
         </p:spPr>
+        <p:txBody>
+          <a:bodyPr/>
+          <a:p/>
+        </p:txBody>
       </p:sp>
       <p:sp>
         <p:nvSpPr>
@@ -21385,6 +22860,10 @@
           </a:solidFill>
           <a:ln/>
         </p:spPr>
+        <p:txBody>
+          <a:bodyPr/>
+          <a:p/>
+        </p:txBody>
       </p:sp>
       <p:sp>
         <p:nvSpPr>
@@ -21490,6 +22969,10 @@
             <a:prstDash val="solid"/>
           </a:ln>
         </p:spPr>
+        <p:txBody>
+          <a:bodyPr/>
+          <a:p/>
+        </p:txBody>
       </p:sp>
       <p:sp>
         <p:nvSpPr>
@@ -21549,6 +23032,10 @@
           </a:solidFill>
           <a:ln/>
         </p:spPr>
+        <p:txBody>
+          <a:bodyPr/>
+          <a:p/>
+        </p:txBody>
       </p:sp>
       <p:sp>
         <p:nvSpPr>
@@ -21571,6 +23058,10 @@
           </a:solidFill>
           <a:ln/>
         </p:spPr>
+        <p:txBody>
+          <a:bodyPr/>
+          <a:p/>
+        </p:txBody>
       </p:sp>
       <p:sp>
         <p:nvSpPr>
@@ -21676,6 +23167,10 @@
             <a:prstDash val="solid"/>
           </a:ln>
         </p:spPr>
+        <p:txBody>
+          <a:bodyPr/>
+          <a:p/>
+        </p:txBody>
       </p:sp>
       <p:sp>
         <p:nvSpPr>
@@ -21735,6 +23230,10 @@
           </a:solidFill>
           <a:ln/>
         </p:spPr>
+        <p:txBody>
+          <a:bodyPr/>
+          <a:p/>
+        </p:txBody>
       </p:sp>
       <p:sp>
         <p:nvSpPr>
@@ -21757,6 +23256,10 @@
           </a:solidFill>
           <a:ln/>
         </p:spPr>
+        <p:txBody>
+          <a:bodyPr/>
+          <a:p/>
+        </p:txBody>
       </p:sp>
       <p:sp>
         <p:nvSpPr>
@@ -21862,6 +23365,10 @@
             <a:prstDash val="solid"/>
           </a:ln>
         </p:spPr>
+        <p:txBody>
+          <a:bodyPr/>
+          <a:p/>
+        </p:txBody>
       </p:sp>
       <p:sp>
         <p:nvSpPr>
@@ -21935,6 +23442,10 @@
             </a:outerShdw>
           </a:effectLst>
         </p:spPr>
+        <p:txBody>
+          <a:bodyPr/>
+          <a:p/>
+        </p:txBody>
       </p:sp>
       <p:sp>
         <p:nvSpPr>
@@ -22142,6 +23653,10 @@
             </a:outerShdw>
           </a:effectLst>
         </p:spPr>
+        <p:txBody>
+          <a:bodyPr/>
+          <a:p/>
+        </p:txBody>
       </p:sp>
       <p:sp>
         <p:nvSpPr>
@@ -22281,6 +23796,10 @@
             <a:prstDash val="solid"/>
           </a:ln>
         </p:spPr>
+        <p:txBody>
+          <a:bodyPr/>
+          <a:p/>
+        </p:txBody>
       </p:sp>
       <p:sp>
         <p:nvSpPr>
@@ -23900,6 +25419,10 @@
             <a:prstDash val="solid"/>
           </a:ln>
         </p:spPr>
+        <p:txBody>
+          <a:bodyPr/>
+          <a:p/>
+        </p:txBody>
       </p:sp>
       <p:sp>
         <p:nvSpPr>
